--- a/output/contoh.pptx
+++ b/output/contoh.pptx
@@ -4023,19 +4023,17 @@
         </p:nvSpPr>
         <p:spPr>
           <a:xfrm>
-            <a:off x="640080" y="2286000"/>
-            <a:ext cx="2377440" cy="1737360"/>
+            <a:off x="640080" y="2331720"/>
+            <a:ext cx="2377440" cy="1554480"/>
           </a:xfrm>
           <a:prstGeom prst="roundRect">
             <a:avLst/>
           </a:prstGeom>
           <a:solidFill>
-            <a:srgbClr val="FFFFFF"/>
+            <a:srgbClr val="14283F"/>
           </a:solidFill>
-          <a:ln w="12700">
-            <a:solidFill>
-              <a:srgbClr val="24405E"/>
-            </a:solidFill>
+          <a:ln>
+            <a:noFill/>
           </a:ln>
         </p:spPr>
         <p:style>
@@ -4068,8 +4066,8 @@
         </p:nvSpPr>
         <p:spPr>
           <a:xfrm>
-            <a:off x="868680" y="2468880"/>
-            <a:ext cx="1920240" cy="1371600"/>
+            <a:off x="868680" y="2496312"/>
+            <a:ext cx="1920240" cy="292608"/>
           </a:xfrm>
           <a:prstGeom prst="rect">
             <a:avLst/>
@@ -4097,6 +4095,29 @@
               <a:t>01</a:t>
             </a:r>
           </a:p>
+        </p:txBody>
+      </p:sp>
+      <p:sp>
+        <p:nvSpPr>
+          <p:cNvPr id="6" name="TextBox 5"/>
+          <p:cNvSpPr txBox="1"/>
+          <p:nvPr/>
+        </p:nvSpPr>
+        <p:spPr>
+          <a:xfrm>
+            <a:off x="868680" y="2788920"/>
+            <a:ext cx="1920240" cy="932688"/>
+          </a:xfrm>
+          <a:prstGeom prst="rect">
+            <a:avLst/>
+          </a:prstGeom>
+          <a:noFill/>
+        </p:spPr>
+        <p:txBody>
+          <a:bodyPr wrap="square" anchor="t">
+            <a:spAutoFit/>
+          </a:bodyPr>
+          <a:lstStyle/>
           <a:p>
             <a:pPr>
               <a:spcAft>
@@ -4106,7 +4127,7 @@
             <a:r>
               <a:rPr sz="1500" b="1">
                 <a:solidFill>
-                  <a:srgbClr val="1A2B3C"/>
+                  <a:srgbClr val="FFFFFF"/>
                 </a:solidFill>
                 <a:latin typeface="Calibri"/>
               </a:rPr>
@@ -4122,7 +4143,7 @@
             <a:r>
               <a:rPr sz="1200" b="0">
                 <a:solidFill>
-                  <a:srgbClr val="5B6B7C"/>
+                  <a:srgbClr val="8FA3B8"/>
                 </a:solidFill>
                 <a:latin typeface="Calibri Light"/>
               </a:rPr>
@@ -4133,25 +4154,23 @@
       </p:sp>
       <p:sp>
         <p:nvSpPr>
-          <p:cNvPr id="6" name="Rounded Rectangle 5"/>
+          <p:cNvPr id="7" name="Rounded Rectangle 6"/>
           <p:cNvSpPr/>
           <p:nvPr/>
         </p:nvSpPr>
         <p:spPr>
           <a:xfrm>
-            <a:off x="3474720" y="2286000"/>
-            <a:ext cx="2377440" cy="1737360"/>
+            <a:off x="3474720" y="2331720"/>
+            <a:ext cx="2377440" cy="1554480"/>
           </a:xfrm>
           <a:prstGeom prst="roundRect">
             <a:avLst/>
           </a:prstGeom>
           <a:solidFill>
-            <a:srgbClr val="FFFFFF"/>
+            <a:srgbClr val="14283F"/>
           </a:solidFill>
-          <a:ln w="12700">
-            <a:solidFill>
-              <a:srgbClr val="24405E"/>
-            </a:solidFill>
+          <a:ln>
+            <a:noFill/>
           </a:ln>
         </p:spPr>
         <p:style>
@@ -4178,14 +4197,14 @@
       </p:sp>
       <p:sp>
         <p:nvSpPr>
-          <p:cNvPr id="7" name="TextBox 6"/>
+          <p:cNvPr id="8" name="TextBox 7"/>
           <p:cNvSpPr txBox="1"/>
           <p:nvPr/>
         </p:nvSpPr>
         <p:spPr>
           <a:xfrm>
-            <a:off x="3703320" y="2468880"/>
-            <a:ext cx="1920240" cy="1371600"/>
+            <a:off x="3703320" y="2496312"/>
+            <a:ext cx="1920240" cy="292608"/>
           </a:xfrm>
           <a:prstGeom prst="rect">
             <a:avLst/>
@@ -4213,6 +4232,29 @@
               <a:t>02</a:t>
             </a:r>
           </a:p>
+        </p:txBody>
+      </p:sp>
+      <p:sp>
+        <p:nvSpPr>
+          <p:cNvPr id="9" name="TextBox 8"/>
+          <p:cNvSpPr txBox="1"/>
+          <p:nvPr/>
+        </p:nvSpPr>
+        <p:spPr>
+          <a:xfrm>
+            <a:off x="3703320" y="2788920"/>
+            <a:ext cx="1920240" cy="932688"/>
+          </a:xfrm>
+          <a:prstGeom prst="rect">
+            <a:avLst/>
+          </a:prstGeom>
+          <a:noFill/>
+        </p:spPr>
+        <p:txBody>
+          <a:bodyPr wrap="square" anchor="t">
+            <a:spAutoFit/>
+          </a:bodyPr>
+          <a:lstStyle/>
           <a:p>
             <a:pPr>
               <a:spcAft>
@@ -4222,7 +4264,7 @@
             <a:r>
               <a:rPr sz="1500" b="1">
                 <a:solidFill>
-                  <a:srgbClr val="1A2B3C"/>
+                  <a:srgbClr val="FFFFFF"/>
                 </a:solidFill>
                 <a:latin typeface="Calibri"/>
               </a:rPr>
@@ -4238,7 +4280,7 @@
             <a:r>
               <a:rPr sz="1200" b="0">
                 <a:solidFill>
-                  <a:srgbClr val="5B6B7C"/>
+                  <a:srgbClr val="8FA3B8"/>
                 </a:solidFill>
                 <a:latin typeface="Calibri Light"/>
               </a:rPr>
@@ -4249,25 +4291,23 @@
       </p:sp>
       <p:sp>
         <p:nvSpPr>
-          <p:cNvPr id="8" name="Rounded Rectangle 7"/>
+          <p:cNvPr id="10" name="Rounded Rectangle 9"/>
           <p:cNvSpPr/>
           <p:nvPr/>
         </p:nvSpPr>
         <p:spPr>
           <a:xfrm>
-            <a:off x="6309360" y="2286000"/>
-            <a:ext cx="2377440" cy="1737360"/>
+            <a:off x="6309360" y="2331720"/>
+            <a:ext cx="2377440" cy="1554480"/>
           </a:xfrm>
           <a:prstGeom prst="roundRect">
             <a:avLst/>
           </a:prstGeom>
           <a:solidFill>
-            <a:srgbClr val="FFFFFF"/>
+            <a:srgbClr val="14283F"/>
           </a:solidFill>
-          <a:ln w="12700">
-            <a:solidFill>
-              <a:srgbClr val="24405E"/>
-            </a:solidFill>
+          <a:ln>
+            <a:noFill/>
           </a:ln>
         </p:spPr>
         <p:style>
@@ -4294,14 +4334,14 @@
       </p:sp>
       <p:sp>
         <p:nvSpPr>
-          <p:cNvPr id="9" name="TextBox 8"/>
+          <p:cNvPr id="11" name="TextBox 10"/>
           <p:cNvSpPr txBox="1"/>
           <p:nvPr/>
         </p:nvSpPr>
         <p:spPr>
           <a:xfrm>
-            <a:off x="6537960" y="2468880"/>
-            <a:ext cx="1920240" cy="1371600"/>
+            <a:off x="6537960" y="2496312"/>
+            <a:ext cx="1920240" cy="292608"/>
           </a:xfrm>
           <a:prstGeom prst="rect">
             <a:avLst/>
@@ -4329,6 +4369,29 @@
               <a:t>03</a:t>
             </a:r>
           </a:p>
+        </p:txBody>
+      </p:sp>
+      <p:sp>
+        <p:nvSpPr>
+          <p:cNvPr id="12" name="TextBox 11"/>
+          <p:cNvSpPr txBox="1"/>
+          <p:nvPr/>
+        </p:nvSpPr>
+        <p:spPr>
+          <a:xfrm>
+            <a:off x="6537960" y="2788920"/>
+            <a:ext cx="1920240" cy="932688"/>
+          </a:xfrm>
+          <a:prstGeom prst="rect">
+            <a:avLst/>
+          </a:prstGeom>
+          <a:noFill/>
+        </p:spPr>
+        <p:txBody>
+          <a:bodyPr wrap="square" anchor="t">
+            <a:spAutoFit/>
+          </a:bodyPr>
+          <a:lstStyle/>
           <a:p>
             <a:pPr>
               <a:spcAft>
@@ -4338,7 +4401,7 @@
             <a:r>
               <a:rPr sz="1500" b="1">
                 <a:solidFill>
-                  <a:srgbClr val="1A2B3C"/>
+                  <a:srgbClr val="FFFFFF"/>
                 </a:solidFill>
                 <a:latin typeface="Calibri"/>
               </a:rPr>
@@ -4354,7 +4417,7 @@
             <a:r>
               <a:rPr sz="1200" b="0">
                 <a:solidFill>
-                  <a:srgbClr val="5B6B7C"/>
+                  <a:srgbClr val="8FA3B8"/>
                 </a:solidFill>
                 <a:latin typeface="Calibri Light"/>
               </a:rPr>
@@ -4365,25 +4428,23 @@
       </p:sp>
       <p:sp>
         <p:nvSpPr>
-          <p:cNvPr id="10" name="Rounded Rectangle 9"/>
+          <p:cNvPr id="13" name="Rounded Rectangle 12"/>
           <p:cNvSpPr/>
           <p:nvPr/>
         </p:nvSpPr>
         <p:spPr>
           <a:xfrm>
-            <a:off x="9144000" y="2286000"/>
-            <a:ext cx="2377440" cy="1737360"/>
+            <a:off x="9144000" y="2331720"/>
+            <a:ext cx="2377440" cy="1554480"/>
           </a:xfrm>
           <a:prstGeom prst="roundRect">
             <a:avLst/>
           </a:prstGeom>
           <a:solidFill>
-            <a:srgbClr val="FFFFFF"/>
+            <a:srgbClr val="14283F"/>
           </a:solidFill>
-          <a:ln w="12700">
-            <a:solidFill>
-              <a:srgbClr val="24405E"/>
-            </a:solidFill>
+          <a:ln>
+            <a:noFill/>
           </a:ln>
         </p:spPr>
         <p:style>
@@ -4410,14 +4471,14 @@
       </p:sp>
       <p:sp>
         <p:nvSpPr>
-          <p:cNvPr id="11" name="TextBox 10"/>
+          <p:cNvPr id="14" name="TextBox 13"/>
           <p:cNvSpPr txBox="1"/>
           <p:nvPr/>
         </p:nvSpPr>
         <p:spPr>
           <a:xfrm>
-            <a:off x="9372600" y="2468880"/>
-            <a:ext cx="1920240" cy="1371600"/>
+            <a:off x="9372600" y="2496312"/>
+            <a:ext cx="1920240" cy="292608"/>
           </a:xfrm>
           <a:prstGeom prst="rect">
             <a:avLst/>
@@ -4445,6 +4506,29 @@
               <a:t>04</a:t>
             </a:r>
           </a:p>
+        </p:txBody>
+      </p:sp>
+      <p:sp>
+        <p:nvSpPr>
+          <p:cNvPr id="15" name="TextBox 14"/>
+          <p:cNvSpPr txBox="1"/>
+          <p:nvPr/>
+        </p:nvSpPr>
+        <p:spPr>
+          <a:xfrm>
+            <a:off x="9372600" y="2788920"/>
+            <a:ext cx="1920240" cy="932688"/>
+          </a:xfrm>
+          <a:prstGeom prst="rect">
+            <a:avLst/>
+          </a:prstGeom>
+          <a:noFill/>
+        </p:spPr>
+        <p:txBody>
+          <a:bodyPr wrap="square" anchor="t">
+            <a:spAutoFit/>
+          </a:bodyPr>
+          <a:lstStyle/>
           <a:p>
             <a:pPr>
               <a:spcAft>
@@ -4454,7 +4538,7 @@
             <a:r>
               <a:rPr sz="1500" b="1">
                 <a:solidFill>
-                  <a:srgbClr val="1A2B3C"/>
+                  <a:srgbClr val="FFFFFF"/>
                 </a:solidFill>
                 <a:latin typeface="Calibri"/>
               </a:rPr>
@@ -4470,7 +4554,7 @@
             <a:r>
               <a:rPr sz="1200" b="0">
                 <a:solidFill>
-                  <a:srgbClr val="5B6B7C"/>
+                  <a:srgbClr val="8FA3B8"/>
                 </a:solidFill>
                 <a:latin typeface="Calibri Light"/>
               </a:rPr>
@@ -4481,7 +4565,7 @@
       </p:sp>
       <p:sp>
         <p:nvSpPr>
-          <p:cNvPr id="12" name="TextBox 11"/>
+          <p:cNvPr id="16" name="TextBox 15"/>
           <p:cNvSpPr txBox="1"/>
           <p:nvPr/>
         </p:nvSpPr>
@@ -4855,14 +4939,57 @@
       </p:sp>
       <p:sp>
         <p:nvSpPr>
-          <p:cNvPr id="4" name="Rectangle 3"/>
+          <p:cNvPr id="4" name="Rounded Rectangle 3"/>
           <p:cNvSpPr/>
           <p:nvPr/>
         </p:nvSpPr>
         <p:spPr>
           <a:xfrm>
-            <a:off x="640080" y="2286000"/>
-            <a:ext cx="73152" cy="822960"/>
+            <a:off x="640080" y="2331720"/>
+            <a:ext cx="10881360" cy="1173480"/>
+          </a:xfrm>
+          <a:prstGeom prst="roundRect">
+            <a:avLst/>
+          </a:prstGeom>
+          <a:solidFill>
+            <a:srgbClr val="14283F"/>
+          </a:solidFill>
+          <a:ln>
+            <a:noFill/>
+          </a:ln>
+        </p:spPr>
+        <p:style>
+          <a:lnRef idx="1">
+            <a:schemeClr val="accent1"/>
+          </a:lnRef>
+          <a:fillRef idx="3">
+            <a:schemeClr val="accent1"/>
+          </a:fillRef>
+          <a:effectRef idx="2">
+            <a:schemeClr val="accent1"/>
+          </a:effectRef>
+          <a:fontRef idx="minor">
+            <a:schemeClr val="lt1"/>
+          </a:fontRef>
+        </p:style>
+        <p:txBody>
+          <a:bodyPr rtlCol="0" anchor="ctr"/>
+          <a:lstStyle/>
+          <a:p>
+            <a:pPr algn="ctr"/>
+          </a:p>
+        </p:txBody>
+      </p:sp>
+      <p:sp>
+        <p:nvSpPr>
+          <p:cNvPr id="5" name="Rectangle 4"/>
+          <p:cNvSpPr/>
+          <p:nvPr/>
+        </p:nvSpPr>
+        <p:spPr>
+          <a:xfrm>
+            <a:off x="804672" y="2459736"/>
+            <a:ext cx="64008" cy="917448"/>
           </a:xfrm>
           <a:prstGeom prst="rect">
             <a:avLst/>
@@ -4898,14 +5025,14 @@
       </p:sp>
       <p:sp>
         <p:nvSpPr>
-          <p:cNvPr id="5" name="TextBox 4"/>
+          <p:cNvPr id="6" name="TextBox 5"/>
           <p:cNvSpPr txBox="1"/>
           <p:nvPr/>
         </p:nvSpPr>
         <p:spPr>
           <a:xfrm>
-            <a:off x="914400" y="2212848"/>
-            <a:ext cx="10607040" cy="1005840"/>
+            <a:off x="1143000" y="2404872"/>
+            <a:ext cx="10104119" cy="1027176"/>
           </a:xfrm>
           <a:prstGeom prst="rect">
             <a:avLst/>
@@ -4924,7 +5051,7 @@
               </a:spcAft>
             </a:pPr>
             <a:r>
-              <a:rPr sz="1700" b="1">
+              <a:rPr sz="1600" b="1">
                 <a:solidFill>
                   <a:srgbClr val="FFFFFF"/>
                 </a:solidFill>
@@ -4940,7 +5067,7 @@
               </a:spcAft>
             </a:pPr>
             <a:r>
-              <a:rPr sz="1300" b="0">
+              <a:rPr sz="1250" b="0">
                 <a:solidFill>
                   <a:srgbClr val="8FA3B8"/>
                 </a:solidFill>
@@ -4953,14 +5080,57 @@
       </p:sp>
       <p:sp>
         <p:nvSpPr>
-          <p:cNvPr id="6" name="Rectangle 5"/>
+          <p:cNvPr id="7" name="Rounded Rectangle 6"/>
           <p:cNvSpPr/>
           <p:nvPr/>
         </p:nvSpPr>
         <p:spPr>
           <a:xfrm>
-            <a:off x="640080" y="3429000"/>
-            <a:ext cx="73152" cy="822960"/>
+            <a:off x="640080" y="3651504"/>
+            <a:ext cx="10881360" cy="1173480"/>
+          </a:xfrm>
+          <a:prstGeom prst="roundRect">
+            <a:avLst/>
+          </a:prstGeom>
+          <a:solidFill>
+            <a:srgbClr val="14283F"/>
+          </a:solidFill>
+          <a:ln>
+            <a:noFill/>
+          </a:ln>
+        </p:spPr>
+        <p:style>
+          <a:lnRef idx="1">
+            <a:schemeClr val="accent1"/>
+          </a:lnRef>
+          <a:fillRef idx="3">
+            <a:schemeClr val="accent1"/>
+          </a:fillRef>
+          <a:effectRef idx="2">
+            <a:schemeClr val="accent1"/>
+          </a:effectRef>
+          <a:fontRef idx="minor">
+            <a:schemeClr val="lt1"/>
+          </a:fontRef>
+        </p:style>
+        <p:txBody>
+          <a:bodyPr rtlCol="0" anchor="ctr"/>
+          <a:lstStyle/>
+          <a:p>
+            <a:pPr algn="ctr"/>
+          </a:p>
+        </p:txBody>
+      </p:sp>
+      <p:sp>
+        <p:nvSpPr>
+          <p:cNvPr id="8" name="Rectangle 7"/>
+          <p:cNvSpPr/>
+          <p:nvPr/>
+        </p:nvSpPr>
+        <p:spPr>
+          <a:xfrm>
+            <a:off x="804672" y="3779519"/>
+            <a:ext cx="64008" cy="917448"/>
           </a:xfrm>
           <a:prstGeom prst="rect">
             <a:avLst/>
@@ -4996,14 +5166,14 @@
       </p:sp>
       <p:sp>
         <p:nvSpPr>
-          <p:cNvPr id="7" name="TextBox 6"/>
+          <p:cNvPr id="9" name="TextBox 8"/>
           <p:cNvSpPr txBox="1"/>
           <p:nvPr/>
         </p:nvSpPr>
         <p:spPr>
           <a:xfrm>
-            <a:off x="914400" y="3355848"/>
-            <a:ext cx="10607040" cy="1005840"/>
+            <a:off x="1143000" y="3724656"/>
+            <a:ext cx="10104119" cy="1027176"/>
           </a:xfrm>
           <a:prstGeom prst="rect">
             <a:avLst/>
@@ -5022,7 +5192,7 @@
               </a:spcAft>
             </a:pPr>
             <a:r>
-              <a:rPr sz="1700" b="1">
+              <a:rPr sz="1600" b="1">
                 <a:solidFill>
                   <a:srgbClr val="FFFFFF"/>
                 </a:solidFill>
@@ -5038,7 +5208,7 @@
               </a:spcAft>
             </a:pPr>
             <a:r>
-              <a:rPr sz="1300" b="0">
+              <a:rPr sz="1250" b="0">
                 <a:solidFill>
                   <a:srgbClr val="8FA3B8"/>
                 </a:solidFill>
@@ -5051,14 +5221,57 @@
       </p:sp>
       <p:sp>
         <p:nvSpPr>
-          <p:cNvPr id="8" name="Rectangle 7"/>
+          <p:cNvPr id="10" name="Rounded Rectangle 9"/>
           <p:cNvSpPr/>
           <p:nvPr/>
         </p:nvSpPr>
         <p:spPr>
           <a:xfrm>
-            <a:off x="640080" y="4572000"/>
-            <a:ext cx="73152" cy="822960"/>
+            <a:off x="640080" y="4971288"/>
+            <a:ext cx="10881360" cy="1173480"/>
+          </a:xfrm>
+          <a:prstGeom prst="roundRect">
+            <a:avLst/>
+          </a:prstGeom>
+          <a:solidFill>
+            <a:srgbClr val="14283F"/>
+          </a:solidFill>
+          <a:ln>
+            <a:noFill/>
+          </a:ln>
+        </p:spPr>
+        <p:style>
+          <a:lnRef idx="1">
+            <a:schemeClr val="accent1"/>
+          </a:lnRef>
+          <a:fillRef idx="3">
+            <a:schemeClr val="accent1"/>
+          </a:fillRef>
+          <a:effectRef idx="2">
+            <a:schemeClr val="accent1"/>
+          </a:effectRef>
+          <a:fontRef idx="minor">
+            <a:schemeClr val="lt1"/>
+          </a:fontRef>
+        </p:style>
+        <p:txBody>
+          <a:bodyPr rtlCol="0" anchor="ctr"/>
+          <a:lstStyle/>
+          <a:p>
+            <a:pPr algn="ctr"/>
+          </a:p>
+        </p:txBody>
+      </p:sp>
+      <p:sp>
+        <p:nvSpPr>
+          <p:cNvPr id="11" name="Rectangle 10"/>
+          <p:cNvSpPr/>
+          <p:nvPr/>
+        </p:nvSpPr>
+        <p:spPr>
+          <a:xfrm>
+            <a:off x="804672" y="5099304"/>
+            <a:ext cx="64008" cy="917448"/>
           </a:xfrm>
           <a:prstGeom prst="rect">
             <a:avLst/>
@@ -5094,14 +5307,14 @@
       </p:sp>
       <p:sp>
         <p:nvSpPr>
-          <p:cNvPr id="9" name="TextBox 8"/>
+          <p:cNvPr id="12" name="TextBox 11"/>
           <p:cNvSpPr txBox="1"/>
           <p:nvPr/>
         </p:nvSpPr>
         <p:spPr>
           <a:xfrm>
-            <a:off x="914400" y="4498848"/>
-            <a:ext cx="10607040" cy="1005840"/>
+            <a:off x="1143000" y="5044440"/>
+            <a:ext cx="10104119" cy="1027176"/>
           </a:xfrm>
           <a:prstGeom prst="rect">
             <a:avLst/>
@@ -5120,7 +5333,7 @@
               </a:spcAft>
             </a:pPr>
             <a:r>
-              <a:rPr sz="1700" b="1">
+              <a:rPr sz="1600" b="1">
                 <a:solidFill>
                   <a:srgbClr val="FFFFFF"/>
                 </a:solidFill>
@@ -5136,7 +5349,7 @@
               </a:spcAft>
             </a:pPr>
             <a:r>
-              <a:rPr sz="1300" b="0">
+              <a:rPr sz="1250" b="0">
                 <a:solidFill>
                   <a:srgbClr val="8FA3B8"/>
                 </a:solidFill>
@@ -5149,7 +5362,7 @@
       </p:sp>
       <p:sp>
         <p:nvSpPr>
-          <p:cNvPr id="10" name="TextBox 9"/>
+          <p:cNvPr id="13" name="TextBox 12"/>
           <p:cNvSpPr txBox="1"/>
           <p:nvPr/>
         </p:nvSpPr>
@@ -5350,8 +5563,8 @@
         </p:nvSpPr>
         <p:spPr>
           <a:xfrm>
-            <a:off x="640080" y="2468880"/>
-            <a:ext cx="2308860" cy="3017520"/>
+            <a:off x="640080" y="2651760"/>
+            <a:ext cx="2308860" cy="2194560"/>
           </a:xfrm>
           <a:prstGeom prst="roundRect">
             <a:avLst/>
@@ -5359,10 +5572,8 @@
           <a:solidFill>
             <a:srgbClr val="14283F"/>
           </a:solidFill>
-          <a:ln w="12700">
-            <a:solidFill>
-              <a:srgbClr val="24405E"/>
-            </a:solidFill>
+          <a:ln>
+            <a:noFill/>
           </a:ln>
         </p:spPr>
         <p:style>
@@ -5389,20 +5600,91 @@
       </p:sp>
       <p:sp>
         <p:nvSpPr>
-          <p:cNvPr id="5" name="Rectangle 4"/>
+          <p:cNvPr id="5" name="TextBox 4"/>
+          <p:cNvSpPr txBox="1"/>
+          <p:nvPr/>
+        </p:nvSpPr>
+        <p:spPr>
+          <a:xfrm>
+            <a:off x="914400" y="2834640"/>
+            <a:ext cx="1760220" cy="1828800"/>
+          </a:xfrm>
+          <a:prstGeom prst="rect">
+            <a:avLst/>
+          </a:prstGeom>
+          <a:noFill/>
+        </p:spPr>
+        <p:txBody>
+          <a:bodyPr wrap="square" anchor="t">
+            <a:spAutoFit/>
+          </a:bodyPr>
+          <a:lstStyle/>
+          <a:p>
+            <a:pPr>
+              <a:spcAft>
+                <a:spcPts val="400"/>
+              </a:spcAft>
+            </a:pPr>
+            <a:r>
+              <a:rPr sz="4400" b="1">
+                <a:solidFill>
+                  <a:srgbClr val="2E9BFF"/>
+                </a:solidFill>
+                <a:latin typeface="Calibri"/>
+              </a:rPr>
+              <a:t>12K+</a:t>
+            </a:r>
+          </a:p>
+          <a:p>
+            <a:pPr>
+              <a:spcAft>
+                <a:spcPts val="400"/>
+              </a:spcAft>
+            </a:pPr>
+            <a:r>
+              <a:rPr sz="1400" b="0">
+                <a:solidFill>
+                  <a:srgbClr val="8FA3B8"/>
+                </a:solidFill>
+                <a:latin typeface="Calibri Light"/>
+              </a:rPr>
+              <a:t>pelanggan / bulan</a:t>
+            </a:r>
+          </a:p>
+          <a:p>
+            <a:pPr>
+              <a:spcAft>
+                <a:spcPts val="400"/>
+              </a:spcAft>
+            </a:pPr>
+            <a:r>
+              <a:rPr sz="1100" b="0">
+                <a:solidFill>
+                  <a:srgbClr val="8FA3B8"/>
+                </a:solidFill>
+                <a:latin typeface="Calibri Light"/>
+              </a:rPr>
+              <a:t>naik 3x YoY</a:t>
+            </a:r>
+          </a:p>
+        </p:txBody>
+      </p:sp>
+      <p:sp>
+        <p:nvSpPr>
+          <p:cNvPr id="6" name="Rounded Rectangle 5"/>
           <p:cNvSpPr/>
           <p:nvPr/>
         </p:nvSpPr>
         <p:spPr>
           <a:xfrm>
-            <a:off x="640080" y="2468880"/>
-            <a:ext cx="2308860" cy="82296"/>
-          </a:xfrm>
-          <a:prstGeom prst="rect">
+            <a:off x="3497580" y="2651760"/>
+            <a:ext cx="2308860" cy="2194560"/>
+          </a:xfrm>
+          <a:prstGeom prst="roundRect">
             <a:avLst/>
           </a:prstGeom>
           <a:solidFill>
-            <a:srgbClr val="2E9BFF"/>
+            <a:srgbClr val="14283F"/>
           </a:solidFill>
           <a:ln>
             <a:noFill/>
@@ -5432,14 +5714,14 @@
       </p:sp>
       <p:sp>
         <p:nvSpPr>
-          <p:cNvPr id="6" name="TextBox 5"/>
+          <p:cNvPr id="7" name="TextBox 6"/>
           <p:cNvSpPr txBox="1"/>
           <p:nvPr/>
         </p:nvSpPr>
         <p:spPr>
           <a:xfrm>
-            <a:off x="914400" y="2743200"/>
-            <a:ext cx="1760220" cy="2468880"/>
+            <a:off x="3771900" y="2834640"/>
+            <a:ext cx="1760220" cy="1828800"/>
           </a:xfrm>
           <a:prstGeom prst="rect">
             <a:avLst/>
@@ -5460,11 +5742,11 @@
             <a:r>
               <a:rPr sz="4400" b="1">
                 <a:solidFill>
-                  <a:srgbClr val="FFB020"/>
+                  <a:srgbClr val="FFFFFF"/>
                 </a:solidFill>
                 <a:latin typeface="Calibri"/>
               </a:rPr>
-              <a:t>12K+</a:t>
+              <a:t>86</a:t>
             </a:r>
           </a:p>
           <a:p>
@@ -5480,7 +5762,7 @@
                 </a:solidFill>
                 <a:latin typeface="Calibri Light"/>
               </a:rPr>
-              <a:t>pelanggan / bulan</a:t>
+              <a:t>petani mitra</a:t>
             </a:r>
           </a:p>
           <a:p>
@@ -5496,21 +5778,21 @@
                 </a:solidFill>
                 <a:latin typeface="Calibri Light"/>
               </a:rPr>
-              <a:t>naik 3x YoY</a:t>
-            </a:r>
-          </a:p>
-        </p:txBody>
-      </p:sp>
-      <p:sp>
-        <p:nvSpPr>
-          <p:cNvPr id="7" name="Rounded Rectangle 6"/>
+              <a:t>3 kabupaten</a:t>
+            </a:r>
+          </a:p>
+        </p:txBody>
+      </p:sp>
+      <p:sp>
+        <p:nvSpPr>
+          <p:cNvPr id="8" name="Rounded Rectangle 7"/>
           <p:cNvSpPr/>
           <p:nvPr/>
         </p:nvSpPr>
         <p:spPr>
           <a:xfrm>
-            <a:off x="3497580" y="2468880"/>
-            <a:ext cx="2308860" cy="3017520"/>
+            <a:off x="6355080" y="2651760"/>
+            <a:ext cx="2308860" cy="2194560"/>
           </a:xfrm>
           <a:prstGeom prst="roundRect">
             <a:avLst/>
@@ -5518,10 +5800,8 @@
           <a:solidFill>
             <a:srgbClr val="14283F"/>
           </a:solidFill>
-          <a:ln w="12700">
-            <a:solidFill>
-              <a:srgbClr val="24405E"/>
-            </a:solidFill>
+          <a:ln>
+            <a:noFill/>
           </a:ln>
         </p:spPr>
         <p:style>
@@ -5548,20 +5828,91 @@
       </p:sp>
       <p:sp>
         <p:nvSpPr>
-          <p:cNvPr id="8" name="Rectangle 7"/>
+          <p:cNvPr id="9" name="TextBox 8"/>
+          <p:cNvSpPr txBox="1"/>
+          <p:nvPr/>
+        </p:nvSpPr>
+        <p:spPr>
+          <a:xfrm>
+            <a:off x="6629400" y="2834640"/>
+            <a:ext cx="1760220" cy="1828800"/>
+          </a:xfrm>
+          <a:prstGeom prst="rect">
+            <a:avLst/>
+          </a:prstGeom>
+          <a:noFill/>
+        </p:spPr>
+        <p:txBody>
+          <a:bodyPr wrap="square" anchor="t">
+            <a:spAutoFit/>
+          </a:bodyPr>
+          <a:lstStyle/>
+          <a:p>
+            <a:pPr>
+              <a:spcAft>
+                <a:spcPts val="400"/>
+              </a:spcAft>
+            </a:pPr>
+            <a:r>
+              <a:rPr sz="4400" b="1">
+                <a:solidFill>
+                  <a:srgbClr val="FFFFFF"/>
+                </a:solidFill>
+                <a:latin typeface="Calibri"/>
+              </a:rPr>
+              <a:t>4.9</a:t>
+            </a:r>
+          </a:p>
+          <a:p>
+            <a:pPr>
+              <a:spcAft>
+                <a:spcPts val="400"/>
+              </a:spcAft>
+            </a:pPr>
+            <a:r>
+              <a:rPr sz="1400" b="0">
+                <a:solidFill>
+                  <a:srgbClr val="8FA3B8"/>
+                </a:solidFill>
+                <a:latin typeface="Calibri Light"/>
+              </a:rPr>
+              <a:t>rating produk</a:t>
+            </a:r>
+          </a:p>
+          <a:p>
+            <a:pPr>
+              <a:spcAft>
+                <a:spcPts val="400"/>
+              </a:spcAft>
+            </a:pPr>
+            <a:r>
+              <a:rPr sz="1100" b="0">
+                <a:solidFill>
+                  <a:srgbClr val="8FA3B8"/>
+                </a:solidFill>
+                <a:latin typeface="Calibri Light"/>
+              </a:rPr>
+              <a:t>2.300 ulasan</a:t>
+            </a:r>
+          </a:p>
+        </p:txBody>
+      </p:sp>
+      <p:sp>
+        <p:nvSpPr>
+          <p:cNvPr id="10" name="Rounded Rectangle 9"/>
           <p:cNvSpPr/>
           <p:nvPr/>
         </p:nvSpPr>
         <p:spPr>
           <a:xfrm>
-            <a:off x="3497580" y="2468880"/>
-            <a:ext cx="2308860" cy="82296"/>
-          </a:xfrm>
-          <a:prstGeom prst="rect">
+            <a:off x="9212580" y="2651760"/>
+            <a:ext cx="2308860" cy="2194560"/>
+          </a:xfrm>
+          <a:prstGeom prst="roundRect">
             <a:avLst/>
           </a:prstGeom>
           <a:solidFill>
-            <a:srgbClr val="2E9BFF"/>
+            <a:srgbClr val="14283F"/>
           </a:solidFill>
           <a:ln>
             <a:noFill/>
@@ -5591,14 +5942,14 @@
       </p:sp>
       <p:sp>
         <p:nvSpPr>
-          <p:cNvPr id="9" name="TextBox 8"/>
+          <p:cNvPr id="11" name="TextBox 10"/>
           <p:cNvSpPr txBox="1"/>
           <p:nvPr/>
         </p:nvSpPr>
         <p:spPr>
           <a:xfrm>
-            <a:off x="3771900" y="2743200"/>
-            <a:ext cx="1760220" cy="2468880"/>
+            <a:off x="9486900" y="2834640"/>
+            <a:ext cx="1760220" cy="1828800"/>
           </a:xfrm>
           <a:prstGeom prst="rect">
             <a:avLst/>
@@ -5623,7 +5974,7 @@
                 </a:solidFill>
                 <a:latin typeface="Calibri"/>
               </a:rPr>
-              <a:t>86</a:t>
+              <a:t>38%</a:t>
             </a:r>
           </a:p>
           <a:p>
@@ -5639,7 +5990,7 @@
                 </a:solidFill>
                 <a:latin typeface="Calibri Light"/>
               </a:rPr>
-              <a:t>petani mitra</a:t>
+              <a:t>repeat order</a:t>
             </a:r>
           </a:p>
           <a:p>
@@ -5655,332 +6006,14 @@
                 </a:solidFill>
                 <a:latin typeface="Calibri Light"/>
               </a:rPr>
-              <a:t>3 kabupaten</a:t>
-            </a:r>
-          </a:p>
-        </p:txBody>
-      </p:sp>
-      <p:sp>
-        <p:nvSpPr>
-          <p:cNvPr id="10" name="Rounded Rectangle 9"/>
-          <p:cNvSpPr/>
-          <p:nvPr/>
-        </p:nvSpPr>
-        <p:spPr>
-          <a:xfrm>
-            <a:off x="6355080" y="2468880"/>
-            <a:ext cx="2308860" cy="3017520"/>
-          </a:xfrm>
-          <a:prstGeom prst="roundRect">
-            <a:avLst/>
-          </a:prstGeom>
-          <a:solidFill>
-            <a:srgbClr val="14283F"/>
-          </a:solidFill>
-          <a:ln w="12700">
-            <a:solidFill>
-              <a:srgbClr val="24405E"/>
-            </a:solidFill>
-          </a:ln>
-        </p:spPr>
-        <p:style>
-          <a:lnRef idx="1">
-            <a:schemeClr val="accent1"/>
-          </a:lnRef>
-          <a:fillRef idx="3">
-            <a:schemeClr val="accent1"/>
-          </a:fillRef>
-          <a:effectRef idx="2">
-            <a:schemeClr val="accent1"/>
-          </a:effectRef>
-          <a:fontRef idx="minor">
-            <a:schemeClr val="lt1"/>
-          </a:fontRef>
-        </p:style>
-        <p:txBody>
-          <a:bodyPr rtlCol="0" anchor="ctr"/>
-          <a:lstStyle/>
-          <a:p>
-            <a:pPr algn="ctr"/>
-          </a:p>
-        </p:txBody>
-      </p:sp>
-      <p:sp>
-        <p:nvSpPr>
-          <p:cNvPr id="11" name="Rectangle 10"/>
-          <p:cNvSpPr/>
-          <p:nvPr/>
-        </p:nvSpPr>
-        <p:spPr>
-          <a:xfrm>
-            <a:off x="6355080" y="2468880"/>
-            <a:ext cx="2308860" cy="82296"/>
-          </a:xfrm>
-          <a:prstGeom prst="rect">
-            <a:avLst/>
-          </a:prstGeom>
-          <a:solidFill>
-            <a:srgbClr val="2E9BFF"/>
-          </a:solidFill>
-          <a:ln>
-            <a:noFill/>
-          </a:ln>
-        </p:spPr>
-        <p:style>
-          <a:lnRef idx="1">
-            <a:schemeClr val="accent1"/>
-          </a:lnRef>
-          <a:fillRef idx="3">
-            <a:schemeClr val="accent1"/>
-          </a:fillRef>
-          <a:effectRef idx="2">
-            <a:schemeClr val="accent1"/>
-          </a:effectRef>
-          <a:fontRef idx="minor">
-            <a:schemeClr val="lt1"/>
-          </a:fontRef>
-        </p:style>
-        <p:txBody>
-          <a:bodyPr rtlCol="0" anchor="ctr"/>
-          <a:lstStyle/>
-          <a:p>
-            <a:pPr algn="ctr"/>
+              <a:t>cohort 90 hari</a:t>
+            </a:r>
           </a:p>
         </p:txBody>
       </p:sp>
       <p:sp>
         <p:nvSpPr>
           <p:cNvPr id="12" name="TextBox 11"/>
-          <p:cNvSpPr txBox="1"/>
-          <p:nvPr/>
-        </p:nvSpPr>
-        <p:spPr>
-          <a:xfrm>
-            <a:off x="6629400" y="2743200"/>
-            <a:ext cx="1760220" cy="2468880"/>
-          </a:xfrm>
-          <a:prstGeom prst="rect">
-            <a:avLst/>
-          </a:prstGeom>
-          <a:noFill/>
-        </p:spPr>
-        <p:txBody>
-          <a:bodyPr wrap="square" anchor="t">
-            <a:spAutoFit/>
-          </a:bodyPr>
-          <a:lstStyle/>
-          <a:p>
-            <a:pPr>
-              <a:spcAft>
-                <a:spcPts val="400"/>
-              </a:spcAft>
-            </a:pPr>
-            <a:r>
-              <a:rPr sz="4400" b="1">
-                <a:solidFill>
-                  <a:srgbClr val="FFFFFF"/>
-                </a:solidFill>
-                <a:latin typeface="Calibri"/>
-              </a:rPr>
-              <a:t>4.9</a:t>
-            </a:r>
-          </a:p>
-          <a:p>
-            <a:pPr>
-              <a:spcAft>
-                <a:spcPts val="400"/>
-              </a:spcAft>
-            </a:pPr>
-            <a:r>
-              <a:rPr sz="1400" b="0">
-                <a:solidFill>
-                  <a:srgbClr val="8FA3B8"/>
-                </a:solidFill>
-                <a:latin typeface="Calibri Light"/>
-              </a:rPr>
-              <a:t>rating produk</a:t>
-            </a:r>
-          </a:p>
-          <a:p>
-            <a:pPr>
-              <a:spcAft>
-                <a:spcPts val="400"/>
-              </a:spcAft>
-            </a:pPr>
-            <a:r>
-              <a:rPr sz="1100" b="0">
-                <a:solidFill>
-                  <a:srgbClr val="8FA3B8"/>
-                </a:solidFill>
-                <a:latin typeface="Calibri Light"/>
-              </a:rPr>
-              <a:t>2.300 ulasan</a:t>
-            </a:r>
-          </a:p>
-        </p:txBody>
-      </p:sp>
-      <p:sp>
-        <p:nvSpPr>
-          <p:cNvPr id="13" name="Rounded Rectangle 12"/>
-          <p:cNvSpPr/>
-          <p:nvPr/>
-        </p:nvSpPr>
-        <p:spPr>
-          <a:xfrm>
-            <a:off x="9212580" y="2468880"/>
-            <a:ext cx="2308860" cy="3017520"/>
-          </a:xfrm>
-          <a:prstGeom prst="roundRect">
-            <a:avLst/>
-          </a:prstGeom>
-          <a:solidFill>
-            <a:srgbClr val="14283F"/>
-          </a:solidFill>
-          <a:ln w="12700">
-            <a:solidFill>
-              <a:srgbClr val="24405E"/>
-            </a:solidFill>
-          </a:ln>
-        </p:spPr>
-        <p:style>
-          <a:lnRef idx="1">
-            <a:schemeClr val="accent1"/>
-          </a:lnRef>
-          <a:fillRef idx="3">
-            <a:schemeClr val="accent1"/>
-          </a:fillRef>
-          <a:effectRef idx="2">
-            <a:schemeClr val="accent1"/>
-          </a:effectRef>
-          <a:fontRef idx="minor">
-            <a:schemeClr val="lt1"/>
-          </a:fontRef>
-        </p:style>
-        <p:txBody>
-          <a:bodyPr rtlCol="0" anchor="ctr"/>
-          <a:lstStyle/>
-          <a:p>
-            <a:pPr algn="ctr"/>
-          </a:p>
-        </p:txBody>
-      </p:sp>
-      <p:sp>
-        <p:nvSpPr>
-          <p:cNvPr id="14" name="Rectangle 13"/>
-          <p:cNvSpPr/>
-          <p:nvPr/>
-        </p:nvSpPr>
-        <p:spPr>
-          <a:xfrm>
-            <a:off x="9212580" y="2468880"/>
-            <a:ext cx="2308860" cy="82296"/>
-          </a:xfrm>
-          <a:prstGeom prst="rect">
-            <a:avLst/>
-          </a:prstGeom>
-          <a:solidFill>
-            <a:srgbClr val="2E9BFF"/>
-          </a:solidFill>
-          <a:ln>
-            <a:noFill/>
-          </a:ln>
-        </p:spPr>
-        <p:style>
-          <a:lnRef idx="1">
-            <a:schemeClr val="accent1"/>
-          </a:lnRef>
-          <a:fillRef idx="3">
-            <a:schemeClr val="accent1"/>
-          </a:fillRef>
-          <a:effectRef idx="2">
-            <a:schemeClr val="accent1"/>
-          </a:effectRef>
-          <a:fontRef idx="minor">
-            <a:schemeClr val="lt1"/>
-          </a:fontRef>
-        </p:style>
-        <p:txBody>
-          <a:bodyPr rtlCol="0" anchor="ctr"/>
-          <a:lstStyle/>
-          <a:p>
-            <a:pPr algn="ctr"/>
-          </a:p>
-        </p:txBody>
-      </p:sp>
-      <p:sp>
-        <p:nvSpPr>
-          <p:cNvPr id="15" name="TextBox 14"/>
-          <p:cNvSpPr txBox="1"/>
-          <p:nvPr/>
-        </p:nvSpPr>
-        <p:spPr>
-          <a:xfrm>
-            <a:off x="9486900" y="2743200"/>
-            <a:ext cx="1760220" cy="2468880"/>
-          </a:xfrm>
-          <a:prstGeom prst="rect">
-            <a:avLst/>
-          </a:prstGeom>
-          <a:noFill/>
-        </p:spPr>
-        <p:txBody>
-          <a:bodyPr wrap="square" anchor="t">
-            <a:spAutoFit/>
-          </a:bodyPr>
-          <a:lstStyle/>
-          <a:p>
-            <a:pPr>
-              <a:spcAft>
-                <a:spcPts val="400"/>
-              </a:spcAft>
-            </a:pPr>
-            <a:r>
-              <a:rPr sz="4400" b="1">
-                <a:solidFill>
-                  <a:srgbClr val="FFFFFF"/>
-                </a:solidFill>
-                <a:latin typeface="Calibri"/>
-              </a:rPr>
-              <a:t>38%</a:t>
-            </a:r>
-          </a:p>
-          <a:p>
-            <a:pPr>
-              <a:spcAft>
-                <a:spcPts val="400"/>
-              </a:spcAft>
-            </a:pPr>
-            <a:r>
-              <a:rPr sz="1400" b="0">
-                <a:solidFill>
-                  <a:srgbClr val="8FA3B8"/>
-                </a:solidFill>
-                <a:latin typeface="Calibri Light"/>
-              </a:rPr>
-              <a:t>repeat order</a:t>
-            </a:r>
-          </a:p>
-          <a:p>
-            <a:pPr>
-              <a:spcAft>
-                <a:spcPts val="400"/>
-              </a:spcAft>
-            </a:pPr>
-            <a:r>
-              <a:rPr sz="1100" b="0">
-                <a:solidFill>
-                  <a:srgbClr val="8FA3B8"/>
-                </a:solidFill>
-                <a:latin typeface="Calibri Light"/>
-              </a:rPr>
-              <a:t>cohort 90 hari</a:t>
-            </a:r>
-          </a:p>
-        </p:txBody>
-      </p:sp>
-      <p:sp>
-        <p:nvSpPr>
-          <p:cNvPr id="16" name="TextBox 15"/>
           <p:cNvSpPr txBox="1"/>
           <p:nvPr/>
         </p:nvSpPr>
@@ -6450,8 +6483,8 @@
           <p:nvPr/>
         </p:nvGraphicFramePr>
         <p:xfrm>
-          <a:off x="640080" y="2286000"/>
-          <a:ext cx="10881360" cy="3840480"/>
+          <a:off x="640080" y="2331720"/>
+          <a:ext cx="10881360" cy="2011680"/>
         </p:xfrm>
         <a:graphic>
           <a:graphicData uri="http://schemas.openxmlformats.org/drawingml/2006/table">
@@ -6464,14 +6497,14 @@
                 <a:gridCol w="3627120"/>
                 <a:gridCol w="3627120"/>
               </a:tblGrid>
-              <a:tr h="960120">
+              <a:tr h="502920">
                 <a:tc>
                   <a:txBody>
                     <a:bodyPr/>
                     <a:lstStyle/>
                     <a:p>
                       <a:r>
-                        <a:rPr sz="1200" b="1">
+                        <a:rPr sz="1300" b="1">
                           <a:solidFill>
                             <a:srgbClr val="FFFFFF"/>
                           </a:solidFill>
@@ -6481,7 +6514,7 @@
                       </a:r>
                     </a:p>
                   </a:txBody>
-                  <a:tcPr>
+                  <a:tcPr anchor="ctr" marL="109728" marR="91440" marT="36576" marB="36576">
                     <a:solidFill>
                       <a:srgbClr val="0B2C4A"/>
                     </a:solidFill>
@@ -6493,7 +6526,7 @@
                     <a:lstStyle/>
                     <a:p>
                       <a:r>
-                        <a:rPr sz="1200" b="1">
+                        <a:rPr sz="1300" b="1">
                           <a:solidFill>
                             <a:srgbClr val="FFFFFF"/>
                           </a:solidFill>
@@ -6503,7 +6536,7 @@
                       </a:r>
                     </a:p>
                   </a:txBody>
-                  <a:tcPr>
+                  <a:tcPr anchor="ctr" marL="109728" marR="91440" marT="36576" marB="36576">
                     <a:solidFill>
                       <a:srgbClr val="0B2C4A"/>
                     </a:solidFill>
@@ -6515,7 +6548,7 @@
                     <a:lstStyle/>
                     <a:p>
                       <a:r>
-                        <a:rPr sz="1200" b="1">
+                        <a:rPr sz="1300" b="1">
                           <a:solidFill>
                             <a:srgbClr val="FFFFFF"/>
                           </a:solidFill>
@@ -6525,21 +6558,21 @@
                       </a:r>
                     </a:p>
                   </a:txBody>
-                  <a:tcPr>
+                  <a:tcPr anchor="ctr" marL="109728" marR="91440" marT="36576" marB="36576">
                     <a:solidFill>
                       <a:srgbClr val="0B2C4A"/>
                     </a:solidFill>
                   </a:tcPr>
                 </a:tc>
               </a:tr>
-              <a:tr h="960120">
+              <a:tr h="502920">
                 <a:tc>
                   <a:txBody>
                     <a:bodyPr/>
                     <a:lstStyle/>
                     <a:p>
                       <a:r>
-                        <a:rPr sz="1100">
+                        <a:rPr sz="1200">
                           <a:solidFill>
                             <a:srgbClr val="1A2B3C"/>
                           </a:solidFill>
@@ -6549,7 +6582,7 @@
                       </a:r>
                     </a:p>
                   </a:txBody>
-                  <a:tcPr>
+                  <a:tcPr anchor="ctr" marL="109728" marR="91440" marT="36576" marB="36576">
                     <a:solidFill>
                       <a:srgbClr val="F3F6FA"/>
                     </a:solidFill>
@@ -6561,7 +6594,7 @@
                     <a:lstStyle/>
                     <a:p>
                       <a:r>
-                        <a:rPr sz="1100">
+                        <a:rPr sz="1200">
                           <a:solidFill>
                             <a:srgbClr val="1A2B3C"/>
                           </a:solidFill>
@@ -6571,7 +6604,7 @@
                       </a:r>
                     </a:p>
                   </a:txBody>
-                  <a:tcPr>
+                  <a:tcPr anchor="ctr" marL="109728" marR="91440" marT="36576" marB="36576">
                     <a:solidFill>
                       <a:srgbClr val="F3F6FA"/>
                     </a:solidFill>
@@ -6583,7 +6616,7 @@
                     <a:lstStyle/>
                     <a:p>
                       <a:r>
-                        <a:rPr sz="1100">
+                        <a:rPr sz="1200">
                           <a:solidFill>
                             <a:srgbClr val="1A2B3C"/>
                           </a:solidFill>
@@ -6593,21 +6626,21 @@
                       </a:r>
                     </a:p>
                   </a:txBody>
-                  <a:tcPr>
+                  <a:tcPr anchor="ctr" marL="109728" marR="91440" marT="36576" marB="36576">
                     <a:solidFill>
                       <a:srgbClr val="F3F6FA"/>
                     </a:solidFill>
                   </a:tcPr>
                 </a:tc>
               </a:tr>
-              <a:tr h="960120">
+              <a:tr h="502920">
                 <a:tc>
                   <a:txBody>
                     <a:bodyPr/>
                     <a:lstStyle/>
                     <a:p>
                       <a:r>
-                        <a:rPr sz="1100">
+                        <a:rPr sz="1200">
                           <a:solidFill>
                             <a:srgbClr val="1A2B3C"/>
                           </a:solidFill>
@@ -6617,7 +6650,7 @@
                       </a:r>
                     </a:p>
                   </a:txBody>
-                  <a:tcPr>
+                  <a:tcPr anchor="ctr" marL="109728" marR="91440" marT="36576" marB="36576">
                     <a:solidFill>
                       <a:srgbClr val="FFFFFF"/>
                     </a:solidFill>
@@ -6629,7 +6662,7 @@
                     <a:lstStyle/>
                     <a:p>
                       <a:r>
-                        <a:rPr sz="1100">
+                        <a:rPr sz="1200">
                           <a:solidFill>
                             <a:srgbClr val="1A2B3C"/>
                           </a:solidFill>
@@ -6639,7 +6672,7 @@
                       </a:r>
                     </a:p>
                   </a:txBody>
-                  <a:tcPr>
+                  <a:tcPr anchor="ctr" marL="109728" marR="91440" marT="36576" marB="36576">
                     <a:solidFill>
                       <a:srgbClr val="FFFFFF"/>
                     </a:solidFill>
@@ -6651,7 +6684,7 @@
                     <a:lstStyle/>
                     <a:p>
                       <a:r>
-                        <a:rPr sz="1100">
+                        <a:rPr sz="1200">
                           <a:solidFill>
                             <a:srgbClr val="1A2B3C"/>
                           </a:solidFill>
@@ -6661,21 +6694,21 @@
                       </a:r>
                     </a:p>
                   </a:txBody>
-                  <a:tcPr>
+                  <a:tcPr anchor="ctr" marL="109728" marR="91440" marT="36576" marB="36576">
                     <a:solidFill>
                       <a:srgbClr val="FFFFFF"/>
                     </a:solidFill>
                   </a:tcPr>
                 </a:tc>
               </a:tr>
-              <a:tr h="960120">
+              <a:tr h="502920">
                 <a:tc>
                   <a:txBody>
                     <a:bodyPr/>
                     <a:lstStyle/>
                     <a:p>
                       <a:r>
-                        <a:rPr sz="1100">
+                        <a:rPr sz="1200">
                           <a:solidFill>
                             <a:srgbClr val="1A2B3C"/>
                           </a:solidFill>
@@ -6685,7 +6718,7 @@
                       </a:r>
                     </a:p>
                   </a:txBody>
-                  <a:tcPr>
+                  <a:tcPr anchor="ctr" marL="109728" marR="91440" marT="36576" marB="36576">
                     <a:solidFill>
                       <a:srgbClr val="F3F6FA"/>
                     </a:solidFill>
@@ -6697,7 +6730,7 @@
                     <a:lstStyle/>
                     <a:p>
                       <a:r>
-                        <a:rPr sz="1100">
+                        <a:rPr sz="1200">
                           <a:solidFill>
                             <a:srgbClr val="1A2B3C"/>
                           </a:solidFill>
@@ -6707,7 +6740,7 @@
                       </a:r>
                     </a:p>
                   </a:txBody>
-                  <a:tcPr>
+                  <a:tcPr anchor="ctr" marL="109728" marR="91440" marT="36576" marB="36576">
                     <a:solidFill>
                       <a:srgbClr val="F3F6FA"/>
                     </a:solidFill>
@@ -6719,7 +6752,7 @@
                     <a:lstStyle/>
                     <a:p>
                       <a:r>
-                        <a:rPr sz="1100">
+                        <a:rPr sz="1200">
                           <a:solidFill>
                             <a:srgbClr val="1A2B3C"/>
                           </a:solidFill>
@@ -6729,7 +6762,7 @@
                       </a:r>
                     </a:p>
                   </a:txBody>
-                  <a:tcPr>
+                  <a:tcPr anchor="ctr" marL="109728" marR="91440" marT="36576" marB="36576">
                     <a:solidFill>
                       <a:srgbClr val="F3F6FA"/>
                     </a:solidFill>
